--- a/deliverables/超滤设备改造_EN.pptx
+++ b/deliverables/超滤设备改造_EN.pptx
@@ -3791,7 +3791,7 @@
                 <a:cs typeface="Times New Roman"/>
                 <a:sym typeface="Impact" panose="020B0806030902050204" pitchFamily="34" charset="0"/>
               </a:rPr>
-              <a:t>Gap Identification – Ultrafiltration</a:t>
+              <a:t>Gap Identification – TFF</a:t>
             </a:r>
             <a:endParaRPr kumimoji="0" lang="en-US" sz="5400" b="1" i="0" u="none" strike="noStrike" kern="1200" cap="none" spc="0" normalizeH="0" baseline="0" noProof="0">
               <a:ln>
@@ -8154,7 +8154,7 @@
                           <a:ea typeface="Times New Roman"/>
                           <a:cs typeface="Times New Roman"/>
                         </a:rPr>
-                        <a:t>UF Skid</a:t>
+                        <a:t>TFF Skid</a:t>
                       </a:r>
                       <a:endParaRPr lang="en-US" sz="1200">
                         <a:latin typeface="Times New Roman"/>
@@ -13337,7 +13337,7 @@
                           <a:ea typeface="Times New Roman"/>
                           <a:cs typeface="Times New Roman"/>
                         </a:rPr>
-                        <a:t>Methanol and Prep Fraction Feed to UF</a:t>
+                        <a:t>Methanol and Prep Fraction Feed to TFF</a:t>
                       </a:r>
                       <a:endParaRPr lang="en-US" sz="800" b="1" i="0" u="none" strike="noStrike">
                         <a:solidFill>
